--- a/docs/songs/how great thou art.pptx
+++ b/docs/songs/how great thou art.pptx
@@ -5,15 +5,18 @@
     <p:sldMasterId id="2147483648" r:id="rId1"/>
   </p:sldMasterIdLst>
   <p:notesMasterIdLst>
-    <p:notesMasterId r:id="rId8"/>
+    <p:notesMasterId r:id="rId11"/>
   </p:notesMasterIdLst>
   <p:sldIdLst>
     <p:sldId id="656" r:id="rId2"/>
     <p:sldId id="657" r:id="rId3"/>
     <p:sldId id="658" r:id="rId4"/>
     <p:sldId id="659" r:id="rId5"/>
-    <p:sldId id="660" r:id="rId6"/>
-    <p:sldId id="661" r:id="rId7"/>
+    <p:sldId id="662" r:id="rId6"/>
+    <p:sldId id="660" r:id="rId7"/>
+    <p:sldId id="663" r:id="rId8"/>
+    <p:sldId id="661" r:id="rId9"/>
+    <p:sldId id="664" r:id="rId10"/>
   </p:sldIdLst>
   <p:sldSz cx="9144000" cy="6858000" type="screen4x3"/>
   <p:notesSz cx="6858000" cy="9144000"/>
@@ -213,7 +216,7 @@
           <a:p>
             <a:fld id="{C57EAEFC-A9C7-464E-BE3F-33D4DD72E122}" type="datetimeFigureOut">
               <a:rPr lang="en-GB" smtClean="0"/>
-              <a:t>09/07/2024</a:t>
+              <a:t>02/03/2026</a:t>
             </a:fld>
             <a:endParaRPr lang="en-GB"/>
           </a:p>
@@ -663,7 +666,7 @@
             <a:fld id="{26EA1CF3-4A15-4CBF-9A5A-6A56C368BE71}" type="datetimeFigureOut">
               <a:rPr lang="en-GB" smtClean="0"/>
               <a:pPr/>
-              <a:t>09/07/2024</a:t>
+              <a:t>02/03/2026</a:t>
             </a:fld>
             <a:endParaRPr lang="en-GB"/>
           </a:p>
@@ -830,7 +833,7 @@
             <a:fld id="{26EA1CF3-4A15-4CBF-9A5A-6A56C368BE71}" type="datetimeFigureOut">
               <a:rPr lang="en-GB" smtClean="0"/>
               <a:pPr/>
-              <a:t>09/07/2024</a:t>
+              <a:t>02/03/2026</a:t>
             </a:fld>
             <a:endParaRPr lang="en-GB"/>
           </a:p>
@@ -1007,7 +1010,7 @@
             <a:fld id="{26EA1CF3-4A15-4CBF-9A5A-6A56C368BE71}" type="datetimeFigureOut">
               <a:rPr lang="en-GB" smtClean="0"/>
               <a:pPr/>
-              <a:t>09/07/2024</a:t>
+              <a:t>02/03/2026</a:t>
             </a:fld>
             <a:endParaRPr lang="en-GB"/>
           </a:p>
@@ -1174,7 +1177,7 @@
             <a:fld id="{26EA1CF3-4A15-4CBF-9A5A-6A56C368BE71}" type="datetimeFigureOut">
               <a:rPr lang="en-GB" smtClean="0"/>
               <a:pPr/>
-              <a:t>09/07/2024</a:t>
+              <a:t>02/03/2026</a:t>
             </a:fld>
             <a:endParaRPr lang="en-GB"/>
           </a:p>
@@ -1417,7 +1420,7 @@
             <a:fld id="{26EA1CF3-4A15-4CBF-9A5A-6A56C368BE71}" type="datetimeFigureOut">
               <a:rPr lang="en-GB" smtClean="0"/>
               <a:pPr/>
-              <a:t>09/07/2024</a:t>
+              <a:t>02/03/2026</a:t>
             </a:fld>
             <a:endParaRPr lang="en-GB"/>
           </a:p>
@@ -1702,7 +1705,7 @@
             <a:fld id="{26EA1CF3-4A15-4CBF-9A5A-6A56C368BE71}" type="datetimeFigureOut">
               <a:rPr lang="en-GB" smtClean="0"/>
               <a:pPr/>
-              <a:t>09/07/2024</a:t>
+              <a:t>02/03/2026</a:t>
             </a:fld>
             <a:endParaRPr lang="en-GB"/>
           </a:p>
@@ -2121,7 +2124,7 @@
             <a:fld id="{26EA1CF3-4A15-4CBF-9A5A-6A56C368BE71}" type="datetimeFigureOut">
               <a:rPr lang="en-GB" smtClean="0"/>
               <a:pPr/>
-              <a:t>09/07/2024</a:t>
+              <a:t>02/03/2026</a:t>
             </a:fld>
             <a:endParaRPr lang="en-GB"/>
           </a:p>
@@ -2236,7 +2239,7 @@
             <a:fld id="{26EA1CF3-4A15-4CBF-9A5A-6A56C368BE71}" type="datetimeFigureOut">
               <a:rPr lang="en-GB" smtClean="0"/>
               <a:pPr/>
-              <a:t>09/07/2024</a:t>
+              <a:t>02/03/2026</a:t>
             </a:fld>
             <a:endParaRPr lang="en-GB"/>
           </a:p>
@@ -2328,7 +2331,7 @@
             <a:fld id="{26EA1CF3-4A15-4CBF-9A5A-6A56C368BE71}" type="datetimeFigureOut">
               <a:rPr lang="en-GB" smtClean="0"/>
               <a:pPr/>
-              <a:t>09/07/2024</a:t>
+              <a:t>02/03/2026</a:t>
             </a:fld>
             <a:endParaRPr lang="en-GB"/>
           </a:p>
@@ -2602,7 +2605,7 @@
             <a:fld id="{26EA1CF3-4A15-4CBF-9A5A-6A56C368BE71}" type="datetimeFigureOut">
               <a:rPr lang="en-GB" smtClean="0"/>
               <a:pPr/>
-              <a:t>09/07/2024</a:t>
+              <a:t>02/03/2026</a:t>
             </a:fld>
             <a:endParaRPr lang="en-GB"/>
           </a:p>
@@ -2852,7 +2855,7 @@
             <a:fld id="{26EA1CF3-4A15-4CBF-9A5A-6A56C368BE71}" type="datetimeFigureOut">
               <a:rPr lang="en-GB" smtClean="0"/>
               <a:pPr/>
-              <a:t>09/07/2024</a:t>
+              <a:t>02/03/2026</a:t>
             </a:fld>
             <a:endParaRPr lang="en-GB"/>
           </a:p>
@@ -3061,7 +3064,7 @@
             <a:fld id="{26EA1CF3-4A15-4CBF-9A5A-6A56C368BE71}" type="datetimeFigureOut">
               <a:rPr lang="en-GB" smtClean="0"/>
               <a:pPr/>
-              <a:t>09/07/2024</a:t>
+              <a:t>02/03/2026</a:t>
             </a:fld>
             <a:endParaRPr lang="en-GB"/>
           </a:p>
@@ -3734,16 +3737,6 @@
           <a:lstStyle/>
           <a:p>
             <a:r>
-              <a:rPr lang="en-GB" sz="3600" b="1" dirty="0">
-                <a:solidFill>
-                  <a:schemeClr val="bg1"/>
-                </a:solidFill>
-              </a:rPr>
-              <a:t>Verse 1</a:t>
-            </a:r>
-          </a:p>
-          <a:p>
-            <a:r>
               <a:rPr lang="en-GB" sz="3600" dirty="0">
                 <a:solidFill>
                   <a:schemeClr val="bg1"/>
@@ -3828,7 +3821,7 @@
                   <a:schemeClr val="bg1"/>
                 </a:solidFill>
               </a:rPr>
-              <a:t>1/5</a:t>
+              <a:t>1/8</a:t>
             </a:r>
           </a:p>
         </p:txBody>
@@ -3886,16 +3879,6 @@
           <a:lstStyle/>
           <a:p>
             <a:r>
-              <a:rPr lang="en-GB" sz="3600" b="1" dirty="0">
-                <a:solidFill>
-                  <a:schemeClr val="bg1"/>
-                </a:solidFill>
-              </a:rPr>
-              <a:t>Chorus</a:t>
-            </a:r>
-          </a:p>
-          <a:p>
-            <a:r>
               <a:rPr lang="en-GB" sz="3600" dirty="0">
                 <a:solidFill>
                   <a:schemeClr val="bg1"/>
@@ -3964,7 +3947,7 @@
                   <a:schemeClr val="bg1"/>
                 </a:solidFill>
               </a:rPr>
-              <a:t>2/5</a:t>
+              <a:t>2/8</a:t>
             </a:r>
           </a:p>
         </p:txBody>
@@ -4022,16 +4005,6 @@
           <a:lstStyle/>
           <a:p>
             <a:r>
-              <a:rPr lang="en-GB" sz="3600" b="1" dirty="0">
-                <a:solidFill>
-                  <a:schemeClr val="bg1"/>
-                </a:solidFill>
-              </a:rPr>
-              <a:t>Verse 2</a:t>
-            </a:r>
-          </a:p>
-          <a:p>
-            <a:r>
               <a:rPr lang="en-GB" sz="3600" dirty="0">
                 <a:solidFill>
                   <a:schemeClr val="bg1"/>
@@ -4100,7 +4073,7 @@
                   <a:schemeClr val="bg1"/>
                 </a:solidFill>
               </a:rPr>
-              <a:t>3/5</a:t>
+              <a:t>3/8</a:t>
             </a:r>
           </a:p>
         </p:txBody>
@@ -4123,7 +4096,13 @@
   <p:cSld>
     <p:spTree>
       <p:nvGrpSpPr>
-        <p:cNvPr id="1" name=""/>
+        <p:cNvPr id="1" name="">
+          <a:extLst>
+            <a:ext uri="{FF2B5EF4-FFF2-40B4-BE49-F238E27FC236}">
+              <a16:creationId xmlns:a16="http://schemas.microsoft.com/office/drawing/2014/main" id="{89767BE1-CAA4-E3A2-676F-3CF36E8F80CF}"/>
+            </a:ext>
+          </a:extLst>
+        </p:cNvPr>
         <p:cNvGrpSpPr/>
         <p:nvPr/>
       </p:nvGrpSpPr>
@@ -4137,7 +4116,13 @@
       </p:grpSpPr>
       <p:sp>
         <p:nvSpPr>
-          <p:cNvPr id="3" name="Subtitle 2"/>
+          <p:cNvPr id="3" name="Subtitle 2">
+            <a:extLst>
+              <a:ext uri="{FF2B5EF4-FFF2-40B4-BE49-F238E27FC236}">
+                <a16:creationId xmlns:a16="http://schemas.microsoft.com/office/drawing/2014/main" id="{79DB27F7-26B3-2B6D-2B0C-12BE932902E5}"/>
+              </a:ext>
+            </a:extLst>
+          </p:cNvPr>
           <p:cNvSpPr>
             <a:spLocks noGrp="1"/>
           </p:cNvSpPr>
@@ -4158,12 +4143,12 @@
           <a:lstStyle/>
           <a:p>
             <a:r>
-              <a:rPr lang="en-GB" sz="3600" b="1" dirty="0">
+              <a:rPr lang="en-GB" sz="3600" dirty="0">
                 <a:solidFill>
                   <a:schemeClr val="bg1"/>
                 </a:solidFill>
               </a:rPr>
-              <a:t>Verse 3</a:t>
+              <a:t>Then sings my soul my Saviour God to Thee</a:t>
             </a:r>
           </a:p>
           <a:p>
@@ -4173,7 +4158,7 @@
                   <a:schemeClr val="bg1"/>
                 </a:solidFill>
               </a:rPr>
-              <a:t>And when I think that God His Son not sparing</a:t>
+              <a:t>How great Thou art how great Thou art</a:t>
             </a:r>
           </a:p>
           <a:p>
@@ -4183,7 +4168,7 @@
                   <a:schemeClr val="bg1"/>
                 </a:solidFill>
               </a:rPr>
-              <a:t>Sent Him to die I scarce can take it in</a:t>
+              <a:t>Then sings my soul my Saviour God to Thee</a:t>
             </a:r>
           </a:p>
           <a:p>
@@ -4193,24 +4178,20 @@
                   <a:schemeClr val="bg1"/>
                 </a:solidFill>
               </a:rPr>
-              <a:t>That on the Cross my burden gladly bearing</a:t>
-            </a:r>
-          </a:p>
-          <a:p>
-            <a:r>
-              <a:rPr lang="en-GB" sz="3600" dirty="0">
-                <a:solidFill>
-                  <a:schemeClr val="bg1"/>
-                </a:solidFill>
-              </a:rPr>
-              <a:t>He bled and died to take away my sin</a:t>
-            </a:r>
-          </a:p>
-        </p:txBody>
-      </p:sp>
-      <p:sp>
-        <p:nvSpPr>
-          <p:cNvPr id="4" name="TextBox 3"/>
+              <a:t>How great Thou art how great Thou art</a:t>
+            </a:r>
+          </a:p>
+        </p:txBody>
+      </p:sp>
+      <p:sp>
+        <p:nvSpPr>
+          <p:cNvPr id="4" name="TextBox 3">
+            <a:extLst>
+              <a:ext uri="{FF2B5EF4-FFF2-40B4-BE49-F238E27FC236}">
+                <a16:creationId xmlns:a16="http://schemas.microsoft.com/office/drawing/2014/main" id="{FF02E1EB-46C2-F8B8-3141-24F8C94401B8}"/>
+              </a:ext>
+            </a:extLst>
+          </p:cNvPr>
           <p:cNvSpPr txBox="1"/>
           <p:nvPr/>
         </p:nvSpPr>
@@ -4236,7 +4217,7 @@
                   <a:schemeClr val="bg1"/>
                 </a:solidFill>
               </a:rPr>
-              <a:t>4/5</a:t>
+              <a:t>4/8</a:t>
             </a:r>
           </a:p>
         </p:txBody>
@@ -4244,7 +4225,7 @@
     </p:spTree>
     <p:extLst>
       <p:ext uri="{BB962C8B-B14F-4D97-AF65-F5344CB8AC3E}">
-        <p14:creationId xmlns:p14="http://schemas.microsoft.com/office/powerpoint/2010/main" val="932368151"/>
+        <p14:creationId xmlns:p14="http://schemas.microsoft.com/office/powerpoint/2010/main" val="2390863201"/>
       </p:ext>
     </p:extLst>
   </p:cSld>
@@ -4294,12 +4275,12 @@
           <a:lstStyle/>
           <a:p>
             <a:r>
-              <a:rPr lang="en-GB" sz="3600" b="1" dirty="0">
+              <a:rPr lang="en-GB" sz="3600" dirty="0">
                 <a:solidFill>
                   <a:schemeClr val="bg1"/>
                 </a:solidFill>
               </a:rPr>
-              <a:t>Verse 4</a:t>
+              <a:t>And when I think that God His Son not sparing</a:t>
             </a:r>
           </a:p>
           <a:p>
@@ -4309,7 +4290,7 @@
                   <a:schemeClr val="bg1"/>
                 </a:solidFill>
               </a:rPr>
-              <a:t>When Christ shall come with shout of acclamation</a:t>
+              <a:t>Sent Him to die I scarce can take it in</a:t>
             </a:r>
           </a:p>
           <a:p>
@@ -4319,7 +4300,7 @@
                   <a:schemeClr val="bg1"/>
                 </a:solidFill>
               </a:rPr>
-              <a:t>And take me home what joy shall fill my heart</a:t>
+              <a:t>That on the Cross my burden gladly bearing</a:t>
             </a:r>
           </a:p>
           <a:p>
@@ -4329,17 +4310,7 @@
                   <a:schemeClr val="bg1"/>
                 </a:solidFill>
               </a:rPr>
-              <a:t>Then shall I bow in humble adoration</a:t>
-            </a:r>
-          </a:p>
-          <a:p>
-            <a:r>
-              <a:rPr lang="en-GB" sz="3600" dirty="0">
-                <a:solidFill>
-                  <a:schemeClr val="bg1"/>
-                </a:solidFill>
-              </a:rPr>
-              <a:t>And there proclaim my God how great Thou art</a:t>
+              <a:t>He bled and died to take away my sin</a:t>
             </a:r>
           </a:p>
         </p:txBody>
@@ -4372,7 +4343,277 @@
                   <a:schemeClr val="bg1"/>
                 </a:solidFill>
               </a:rPr>
-              <a:t>5/5</a:t>
+              <a:t>5/8</a:t>
+            </a:r>
+          </a:p>
+        </p:txBody>
+      </p:sp>
+    </p:spTree>
+    <p:extLst>
+      <p:ext uri="{BB962C8B-B14F-4D97-AF65-F5344CB8AC3E}">
+        <p14:creationId xmlns:p14="http://schemas.microsoft.com/office/powerpoint/2010/main" val="932368151"/>
+      </p:ext>
+    </p:extLst>
+  </p:cSld>
+  <p:clrMapOvr>
+    <a:masterClrMapping/>
+  </p:clrMapOvr>
+</p:sld>
+</file>
+
+<file path=ppt/slides/slide7.xml><?xml version="1.0" encoding="utf-8"?>
+<p:sld xmlns:a="http://schemas.openxmlformats.org/drawingml/2006/main" xmlns:r="http://schemas.openxmlformats.org/officeDocument/2006/relationships" xmlns:p="http://schemas.openxmlformats.org/presentationml/2006/main">
+  <p:cSld>
+    <p:spTree>
+      <p:nvGrpSpPr>
+        <p:cNvPr id="1" name="">
+          <a:extLst>
+            <a:ext uri="{FF2B5EF4-FFF2-40B4-BE49-F238E27FC236}">
+              <a16:creationId xmlns:a16="http://schemas.microsoft.com/office/drawing/2014/main" id="{CDC6D66B-BE66-AFF7-AA28-8797FE5338E5}"/>
+            </a:ext>
+          </a:extLst>
+        </p:cNvPr>
+        <p:cNvGrpSpPr/>
+        <p:nvPr/>
+      </p:nvGrpSpPr>
+      <p:grpSpPr>
+        <a:xfrm>
+          <a:off x="0" y="0"/>
+          <a:ext cx="0" cy="0"/>
+          <a:chOff x="0" y="0"/>
+          <a:chExt cx="0" cy="0"/>
+        </a:xfrm>
+      </p:grpSpPr>
+      <p:sp>
+        <p:nvSpPr>
+          <p:cNvPr id="3" name="Subtitle 2">
+            <a:extLst>
+              <a:ext uri="{FF2B5EF4-FFF2-40B4-BE49-F238E27FC236}">
+                <a16:creationId xmlns:a16="http://schemas.microsoft.com/office/drawing/2014/main" id="{7964BAC7-3E39-73D8-C9F7-AF51B3EA8958}"/>
+              </a:ext>
+            </a:extLst>
+          </p:cNvPr>
+          <p:cNvSpPr>
+            <a:spLocks noGrp="1"/>
+          </p:cNvSpPr>
+          <p:nvPr>
+            <p:ph type="subTitle" idx="1"/>
+          </p:nvPr>
+        </p:nvSpPr>
+        <p:spPr>
+          <a:xfrm>
+            <a:off x="251520" y="692696"/>
+            <a:ext cx="8640960" cy="6480720"/>
+          </a:xfrm>
+        </p:spPr>
+        <p:txBody>
+          <a:bodyPr>
+            <a:noAutofit/>
+          </a:bodyPr>
+          <a:lstStyle/>
+          <a:p>
+            <a:r>
+              <a:rPr lang="en-GB" sz="3600" dirty="0">
+                <a:solidFill>
+                  <a:schemeClr val="bg1"/>
+                </a:solidFill>
+              </a:rPr>
+              <a:t>Then sings my soul my Saviour God to Thee</a:t>
+            </a:r>
+          </a:p>
+          <a:p>
+            <a:r>
+              <a:rPr lang="en-GB" sz="3600" dirty="0">
+                <a:solidFill>
+                  <a:schemeClr val="bg1"/>
+                </a:solidFill>
+              </a:rPr>
+              <a:t>How great Thou art how great Thou art</a:t>
+            </a:r>
+          </a:p>
+          <a:p>
+            <a:r>
+              <a:rPr lang="en-GB" sz="3600" dirty="0">
+                <a:solidFill>
+                  <a:schemeClr val="bg1"/>
+                </a:solidFill>
+              </a:rPr>
+              <a:t>Then sings my soul my Saviour God to Thee</a:t>
+            </a:r>
+          </a:p>
+          <a:p>
+            <a:r>
+              <a:rPr lang="en-GB" sz="3600" dirty="0">
+                <a:solidFill>
+                  <a:schemeClr val="bg1"/>
+                </a:solidFill>
+              </a:rPr>
+              <a:t>How great Thou art how great Thou art</a:t>
+            </a:r>
+          </a:p>
+        </p:txBody>
+      </p:sp>
+      <p:sp>
+        <p:nvSpPr>
+          <p:cNvPr id="4" name="TextBox 3">
+            <a:extLst>
+              <a:ext uri="{FF2B5EF4-FFF2-40B4-BE49-F238E27FC236}">
+                <a16:creationId xmlns:a16="http://schemas.microsoft.com/office/drawing/2014/main" id="{1741BD1C-F39D-4A27-88E5-E6C8FDC6DAA4}"/>
+              </a:ext>
+            </a:extLst>
+          </p:cNvPr>
+          <p:cNvSpPr txBox="1"/>
+          <p:nvPr/>
+        </p:nvSpPr>
+        <p:spPr>
+          <a:xfrm>
+            <a:off x="8529729" y="0"/>
+            <a:ext cx="628698" cy="461665"/>
+          </a:xfrm>
+          <a:prstGeom prst="rect">
+            <a:avLst/>
+          </a:prstGeom>
+          <a:noFill/>
+        </p:spPr>
+        <p:txBody>
+          <a:bodyPr wrap="none" rtlCol="0">
+            <a:spAutoFit/>
+          </a:bodyPr>
+          <a:lstStyle/>
+          <a:p>
+            <a:r>
+              <a:rPr lang="en-GB" sz="2400" b="1" dirty="0">
+                <a:solidFill>
+                  <a:schemeClr val="bg1"/>
+                </a:solidFill>
+              </a:rPr>
+              <a:t>6/8</a:t>
+            </a:r>
+          </a:p>
+        </p:txBody>
+      </p:sp>
+    </p:spTree>
+    <p:extLst>
+      <p:ext uri="{BB962C8B-B14F-4D97-AF65-F5344CB8AC3E}">
+        <p14:creationId xmlns:p14="http://schemas.microsoft.com/office/powerpoint/2010/main" val="1210357949"/>
+      </p:ext>
+    </p:extLst>
+  </p:cSld>
+  <p:clrMapOvr>
+    <a:masterClrMapping/>
+  </p:clrMapOvr>
+</p:sld>
+</file>
+
+<file path=ppt/slides/slide8.xml><?xml version="1.0" encoding="utf-8"?>
+<p:sld xmlns:a="http://schemas.openxmlformats.org/drawingml/2006/main" xmlns:r="http://schemas.openxmlformats.org/officeDocument/2006/relationships" xmlns:p="http://schemas.openxmlformats.org/presentationml/2006/main">
+  <p:cSld>
+    <p:spTree>
+      <p:nvGrpSpPr>
+        <p:cNvPr id="1" name=""/>
+        <p:cNvGrpSpPr/>
+        <p:nvPr/>
+      </p:nvGrpSpPr>
+      <p:grpSpPr>
+        <a:xfrm>
+          <a:off x="0" y="0"/>
+          <a:ext cx="0" cy="0"/>
+          <a:chOff x="0" y="0"/>
+          <a:chExt cx="0" cy="0"/>
+        </a:xfrm>
+      </p:grpSpPr>
+      <p:sp>
+        <p:nvSpPr>
+          <p:cNvPr id="3" name="Subtitle 2"/>
+          <p:cNvSpPr>
+            <a:spLocks noGrp="1"/>
+          </p:cNvSpPr>
+          <p:nvPr>
+            <p:ph type="subTitle" idx="1"/>
+          </p:nvPr>
+        </p:nvSpPr>
+        <p:spPr>
+          <a:xfrm>
+            <a:off x="251520" y="692696"/>
+            <a:ext cx="8640960" cy="6480720"/>
+          </a:xfrm>
+        </p:spPr>
+        <p:txBody>
+          <a:bodyPr>
+            <a:noAutofit/>
+          </a:bodyPr>
+          <a:lstStyle/>
+          <a:p>
+            <a:r>
+              <a:rPr lang="en-GB" sz="3600" dirty="0">
+                <a:solidFill>
+                  <a:schemeClr val="bg1"/>
+                </a:solidFill>
+              </a:rPr>
+              <a:t>When Christ shall come with shout of acclamation</a:t>
+            </a:r>
+          </a:p>
+          <a:p>
+            <a:r>
+              <a:rPr lang="en-GB" sz="3600" dirty="0">
+                <a:solidFill>
+                  <a:schemeClr val="bg1"/>
+                </a:solidFill>
+              </a:rPr>
+              <a:t>And take me home what joy shall fill my heart</a:t>
+            </a:r>
+          </a:p>
+          <a:p>
+            <a:r>
+              <a:rPr lang="en-GB" sz="3600" dirty="0">
+                <a:solidFill>
+                  <a:schemeClr val="bg1"/>
+                </a:solidFill>
+              </a:rPr>
+              <a:t>Then shall I bow in humble adoration</a:t>
+            </a:r>
+          </a:p>
+          <a:p>
+            <a:r>
+              <a:rPr lang="en-GB" sz="3600" dirty="0">
+                <a:solidFill>
+                  <a:schemeClr val="bg1"/>
+                </a:solidFill>
+              </a:rPr>
+              <a:t>And there proclaim my God how great Thou art</a:t>
+            </a:r>
+          </a:p>
+        </p:txBody>
+      </p:sp>
+      <p:sp>
+        <p:nvSpPr>
+          <p:cNvPr id="4" name="TextBox 3"/>
+          <p:cNvSpPr txBox="1"/>
+          <p:nvPr/>
+        </p:nvSpPr>
+        <p:spPr>
+          <a:xfrm>
+            <a:off x="8529729" y="0"/>
+            <a:ext cx="628698" cy="461665"/>
+          </a:xfrm>
+          <a:prstGeom prst="rect">
+            <a:avLst/>
+          </a:prstGeom>
+          <a:noFill/>
+        </p:spPr>
+        <p:txBody>
+          <a:bodyPr wrap="none" rtlCol="0">
+            <a:spAutoFit/>
+          </a:bodyPr>
+          <a:lstStyle/>
+          <a:p>
+            <a:r>
+              <a:rPr lang="en-GB" sz="2400" b="1" dirty="0">
+                <a:solidFill>
+                  <a:schemeClr val="bg1"/>
+                </a:solidFill>
+              </a:rPr>
+              <a:t>7/8</a:t>
             </a:r>
           </a:p>
         </p:txBody>
@@ -4381,6 +4622,150 @@
     <p:extLst>
       <p:ext uri="{BB962C8B-B14F-4D97-AF65-F5344CB8AC3E}">
         <p14:creationId xmlns:p14="http://schemas.microsoft.com/office/powerpoint/2010/main" val="3575374396"/>
+      </p:ext>
+    </p:extLst>
+  </p:cSld>
+  <p:clrMapOvr>
+    <a:masterClrMapping/>
+  </p:clrMapOvr>
+</p:sld>
+</file>
+
+<file path=ppt/slides/slide9.xml><?xml version="1.0" encoding="utf-8"?>
+<p:sld xmlns:a="http://schemas.openxmlformats.org/drawingml/2006/main" xmlns:r="http://schemas.openxmlformats.org/officeDocument/2006/relationships" xmlns:p="http://schemas.openxmlformats.org/presentationml/2006/main">
+  <p:cSld>
+    <p:spTree>
+      <p:nvGrpSpPr>
+        <p:cNvPr id="1" name="">
+          <a:extLst>
+            <a:ext uri="{FF2B5EF4-FFF2-40B4-BE49-F238E27FC236}">
+              <a16:creationId xmlns:a16="http://schemas.microsoft.com/office/drawing/2014/main" id="{B662EFF7-AFDD-5595-4D15-6F4E61722373}"/>
+            </a:ext>
+          </a:extLst>
+        </p:cNvPr>
+        <p:cNvGrpSpPr/>
+        <p:nvPr/>
+      </p:nvGrpSpPr>
+      <p:grpSpPr>
+        <a:xfrm>
+          <a:off x="0" y="0"/>
+          <a:ext cx="0" cy="0"/>
+          <a:chOff x="0" y="0"/>
+          <a:chExt cx="0" cy="0"/>
+        </a:xfrm>
+      </p:grpSpPr>
+      <p:sp>
+        <p:nvSpPr>
+          <p:cNvPr id="3" name="Subtitle 2">
+            <a:extLst>
+              <a:ext uri="{FF2B5EF4-FFF2-40B4-BE49-F238E27FC236}">
+                <a16:creationId xmlns:a16="http://schemas.microsoft.com/office/drawing/2014/main" id="{8C8CFEFB-C72F-4A17-9435-59F3D5005B95}"/>
+              </a:ext>
+            </a:extLst>
+          </p:cNvPr>
+          <p:cNvSpPr>
+            <a:spLocks noGrp="1"/>
+          </p:cNvSpPr>
+          <p:nvPr>
+            <p:ph type="subTitle" idx="1"/>
+          </p:nvPr>
+        </p:nvSpPr>
+        <p:spPr>
+          <a:xfrm>
+            <a:off x="251520" y="692696"/>
+            <a:ext cx="8640960" cy="6480720"/>
+          </a:xfrm>
+        </p:spPr>
+        <p:txBody>
+          <a:bodyPr>
+            <a:noAutofit/>
+          </a:bodyPr>
+          <a:lstStyle/>
+          <a:p>
+            <a:r>
+              <a:rPr lang="en-GB" sz="3600" dirty="0">
+                <a:solidFill>
+                  <a:schemeClr val="bg1"/>
+                </a:solidFill>
+              </a:rPr>
+              <a:t>Then sings my soul my Saviour God to Thee</a:t>
+            </a:r>
+          </a:p>
+          <a:p>
+            <a:r>
+              <a:rPr lang="en-GB" sz="3600" dirty="0">
+                <a:solidFill>
+                  <a:schemeClr val="bg1"/>
+                </a:solidFill>
+              </a:rPr>
+              <a:t>How great Thou art how great Thou art</a:t>
+            </a:r>
+          </a:p>
+          <a:p>
+            <a:r>
+              <a:rPr lang="en-GB" sz="3600" dirty="0">
+                <a:solidFill>
+                  <a:schemeClr val="bg1"/>
+                </a:solidFill>
+              </a:rPr>
+              <a:t>Then sings my soul my Saviour God to Thee</a:t>
+            </a:r>
+          </a:p>
+          <a:p>
+            <a:r>
+              <a:rPr lang="en-GB" sz="3600" dirty="0">
+                <a:solidFill>
+                  <a:schemeClr val="bg1"/>
+                </a:solidFill>
+              </a:rPr>
+              <a:t>How great Thou art how great Thou art</a:t>
+            </a:r>
+          </a:p>
+        </p:txBody>
+      </p:sp>
+      <p:sp>
+        <p:nvSpPr>
+          <p:cNvPr id="4" name="TextBox 3">
+            <a:extLst>
+              <a:ext uri="{FF2B5EF4-FFF2-40B4-BE49-F238E27FC236}">
+                <a16:creationId xmlns:a16="http://schemas.microsoft.com/office/drawing/2014/main" id="{54B08859-D713-BD15-D5EA-5B05060C57FA}"/>
+              </a:ext>
+            </a:extLst>
+          </p:cNvPr>
+          <p:cNvSpPr txBox="1"/>
+          <p:nvPr/>
+        </p:nvSpPr>
+        <p:spPr>
+          <a:xfrm>
+            <a:off x="8529729" y="0"/>
+            <a:ext cx="628698" cy="461665"/>
+          </a:xfrm>
+          <a:prstGeom prst="rect">
+            <a:avLst/>
+          </a:prstGeom>
+          <a:noFill/>
+        </p:spPr>
+        <p:txBody>
+          <a:bodyPr wrap="square" rtlCol="0">
+            <a:spAutoFit/>
+          </a:bodyPr>
+          <a:lstStyle/>
+          <a:p>
+            <a:r>
+              <a:rPr lang="en-GB" sz="2400" b="1" dirty="0">
+                <a:solidFill>
+                  <a:schemeClr val="bg1"/>
+                </a:solidFill>
+              </a:rPr>
+              <a:t>8/8</a:t>
+            </a:r>
+          </a:p>
+        </p:txBody>
+      </p:sp>
+    </p:spTree>
+    <p:extLst>
+      <p:ext uri="{BB962C8B-B14F-4D97-AF65-F5344CB8AC3E}">
+        <p14:creationId xmlns:p14="http://schemas.microsoft.com/office/powerpoint/2010/main" val="96340857"/>
       </p:ext>
     </p:extLst>
   </p:cSld>
